--- a/apps/web/tests/fixtures/sample.pptx
+++ b/apps/web/tests/fixtures/sample.pptx
@@ -8,6 +8,7 @@
     <p:sldId id="256" r:id="rId7"/>
     <p:sldId id="257" r:id="rId8"/>
     <p:sldId id="258" r:id="rId9"/>
+    <p:sldId id="259" r:id="rId10"/>
   </p:sldIdLst>
   <p:sldSz cx="12191695" cy="6858000" type="screen4x3"/>
   <p:notesSz cx="6858000" cy="9144000"/>
@@ -3440,6 +3441,74 @@
           </a:p>
         </p:txBody>
       </p:sp>
+    </p:spTree>
+  </p:cSld>
+  <p:clrMapOvr>
+    <a:masterClrMapping/>
+  </p:clrMapOvr>
+</p:sld>
+</file>
+
+<file path=ppt/slides/slide4.xml><?xml version="1.0" encoding="utf-8"?>
+<p:sld xmlns:a="http://schemas.openxmlformats.org/drawingml/2006/main" xmlns:p="http://schemas.openxmlformats.org/presentationml/2006/main" xmlns:r="http://schemas.openxmlformats.org/officeDocument/2006/relationships">
+  <p:cSld>
+    <p:spTree>
+      <p:nvGrpSpPr>
+        <p:cNvPr id="1" name=""/>
+        <p:cNvGrpSpPr/>
+        <p:nvPr/>
+      </p:nvGrpSpPr>
+      <p:grpSpPr/>
+      <p:sp>
+        <p:nvSpPr>
+          <p:cNvPr id="2" name="Title 1"/>
+          <p:cNvSpPr>
+            <a:spLocks noGrp="1"/>
+          </p:cNvSpPr>
+          <p:nvPr>
+            <p:ph type="title"/>
+          </p:nvPr>
+        </p:nvSpPr>
+        <p:spPr>
+          <a:xfrm>
+            <a:off x="4572000" y="5486400"/>
+            <a:ext cx="2743200" cy="914400"/>
+          </a:xfrm>
+        </p:spPr>
+        <p:txBody>
+          <a:bodyPr/>
+          <a:lstStyle/>
+          <a:p>
+            <a:r>
+              <a:t>AI 에이전트</a:t>
+            </a:r>
+          </a:p>
+        </p:txBody>
+      </p:sp>
+      <p:pic>
+        <p:nvPicPr>
+          <p:cNvPr id="3" name="Picture 2" descr="_red.png"/>
+          <p:cNvPicPr>
+            <a:picLocks noChangeAspect="1"/>
+          </p:cNvPicPr>
+          <p:nvPr/>
+        </p:nvPicPr>
+        <p:blipFill>
+          <a:blip r:embed="rId2"/>
+          <a:stretch>
+            <a:fillRect/>
+          </a:stretch>
+        </p:blipFill>
+        <p:spPr>
+          <a:xfrm>
+            <a:off x="3657600" y="457200"/>
+            <a:ext cx="4572000" cy="4572000"/>
+          </a:xfrm>
+          <a:prstGeom prst="rect">
+            <a:avLst/>
+          </a:prstGeom>
+        </p:spPr>
+      </p:pic>
     </p:spTree>
   </p:cSld>
   <p:clrMapOvr>

--- a/apps/web/tests/fixtures/sample.pptx
+++ b/apps/web/tests/fixtures/sample.pptx
@@ -3495,6 +3495,7 @@
         </p:nvPicPr>
         <p:blipFill>
           <a:blip r:embed="rId2"/>
+          <a:srcRect l="25000" r="25000" t="10000"/>
           <a:stretch>
             <a:fillRect/>
           </a:stretch>
